--- a/eloadasDone.pptx
+++ b/eloadasDone.pptx
@@ -119,6 +119,11 @@
       </a:defRPr>
     </a:lvl9pPr>
   </p:defaultTextStyle>
+  <p:extLst>
+    <p:ext uri="{EFAFB233-063F-42B5-8137-9DF3F51BA10A}">
+      <p15:sldGuideLst xmlns:p15="http://schemas.microsoft.com/office/powerpoint/2012/main"/>
+    </p:ext>
+  </p:extLst>
 </p:presentation>
 </file>
 
@@ -1618,284 +1623,285 @@
         </p:nvSpPr>
         <p:spPr>
           <a:xfrm>
-            <a:off x="504000" y="1326600"/>
-            <a:ext cx="9071640" cy="3288240"/>
+            <a:off x="504000" y="1003999"/>
+            <a:ext cx="8984774" cy="3988784"/>
           </a:xfrm>
         </p:spPr>
         <p:txBody>
           <a:bodyPr/>
           <a:lstStyle/>
           <a:p>
-            <a:r>
-              <a:rPr lang="en-US" dirty="0" err="1"/>
+            <a:pPr algn="l"/>
+            <a:r>
+              <a:rPr lang="en-US" sz="3600" dirty="0" err="1"/>
               <a:t>Véletlenszerűen</a:t>
             </a:r>
             <a:r>
-              <a:rPr lang="en-US" dirty="0"/>
-              <a:t> </a:t>
-            </a:r>
-            <a:r>
-              <a:rPr lang="en-US" dirty="0" err="1"/>
+              <a:rPr lang="en-US" sz="3600" dirty="0"/>
+              <a:t> </a:t>
+            </a:r>
+            <a:r>
+              <a:rPr lang="en-US" sz="3600" dirty="0" err="1"/>
               <a:t>generált</a:t>
             </a:r>
             <a:r>
-              <a:rPr lang="en-US" dirty="0"/>
-              <a:t> </a:t>
-            </a:r>
-            <a:r>
-              <a:rPr lang="en-US" dirty="0" err="1"/>
+              <a:rPr lang="en-US" sz="3600" dirty="0"/>
+              <a:t> </a:t>
+            </a:r>
+            <a:r>
+              <a:rPr lang="en-US" sz="3600" dirty="0" err="1"/>
               <a:t>számok</a:t>
             </a:r>
             <a:r>
-              <a:rPr lang="en-US" dirty="0"/>
-              <a:t> </a:t>
-            </a:r>
-            <a:r>
-              <a:rPr lang="en-US" dirty="0" err="1"/>
+              <a:rPr lang="en-US" sz="3600" dirty="0"/>
+              <a:t> </a:t>
+            </a:r>
+            <a:r>
+              <a:rPr lang="en-US" sz="3600" dirty="0" err="1"/>
               <a:t>segítségével</a:t>
             </a:r>
             <a:r>
-              <a:rPr lang="en-US" dirty="0"/>
-              <a:t> </a:t>
-            </a:r>
-            <a:r>
-              <a:rPr lang="en-US" dirty="0" err="1"/>
+              <a:rPr lang="en-US" sz="3600" dirty="0"/>
+              <a:t> </a:t>
+            </a:r>
+            <a:r>
+              <a:rPr lang="en-US" sz="3600" dirty="0" err="1"/>
               <a:t>két</a:t>
             </a:r>
             <a:r>
-              <a:rPr lang="en-US" dirty="0"/>
-              <a:t> </a:t>
-            </a:r>
-            <a:r>
-              <a:rPr lang="en-US" dirty="0" err="1"/>
+              <a:rPr lang="en-US" sz="3600" dirty="0"/>
+              <a:t> </a:t>
+            </a:r>
+            <a:r>
+              <a:rPr lang="en-US" sz="3600" dirty="0" err="1"/>
               <a:t>tömbből</a:t>
             </a:r>
             <a:r>
-              <a:rPr lang="en-US" dirty="0"/>
-              <a:t> </a:t>
-            </a:r>
-            <a:r>
-              <a:rPr lang="en-US" dirty="0" err="1"/>
+              <a:rPr lang="en-US" sz="3600" dirty="0"/>
+              <a:t> </a:t>
+            </a:r>
+            <a:r>
+              <a:rPr lang="en-US" sz="3600" dirty="0" err="1"/>
               <a:t>választ</a:t>
             </a:r>
             <a:r>
-              <a:rPr lang="en-US" dirty="0"/>
+              <a:rPr lang="en-US" sz="3600" dirty="0"/>
               <a:t> ki </a:t>
             </a:r>
             <a:r>
-              <a:rPr lang="en-US" dirty="0" err="1"/>
+              <a:rPr lang="en-US" sz="3600" dirty="0" err="1"/>
               <a:t>egy</a:t>
             </a:r>
             <a:r>
-              <a:rPr lang="en-US" dirty="0"/>
-              <a:t> </a:t>
-            </a:r>
-            <a:r>
-              <a:rPr lang="en-US" dirty="0" err="1"/>
+              <a:rPr lang="en-US" sz="3600" dirty="0"/>
+              <a:t> </a:t>
+            </a:r>
+            <a:r>
+              <a:rPr lang="en-US" sz="3600" dirty="0" err="1"/>
               <a:t>hírt</a:t>
             </a:r>
             <a:r>
-              <a:rPr lang="en-US" dirty="0"/>
-              <a:t> </a:t>
-            </a:r>
-            <a:r>
-              <a:rPr lang="en-US" dirty="0" err="1"/>
+              <a:rPr lang="en-US" sz="3600" dirty="0"/>
+              <a:t> </a:t>
+            </a:r>
+            <a:r>
+              <a:rPr lang="en-US" sz="3600" dirty="0" err="1"/>
               <a:t>minden</a:t>
             </a:r>
             <a:r>
-              <a:rPr lang="en-US" dirty="0"/>
-              <a:t> </a:t>
-            </a:r>
-            <a:r>
-              <a:rPr lang="en-US" dirty="0" err="1"/>
+              <a:rPr lang="en-US" sz="3600" dirty="0"/>
+              <a:t> </a:t>
+            </a:r>
+            <a:r>
+              <a:rPr lang="en-US" sz="3600" dirty="0" err="1"/>
               <a:t>cég</a:t>
             </a:r>
             <a:r>
-              <a:rPr lang="en-US" dirty="0"/>
-              <a:t> </a:t>
-            </a:r>
-            <a:r>
-              <a:rPr lang="en-US" dirty="0" err="1"/>
+              <a:rPr lang="en-US" sz="3600" dirty="0"/>
+              <a:t> </a:t>
+            </a:r>
+            <a:r>
+              <a:rPr lang="en-US" sz="3600" dirty="0" err="1"/>
               <a:t>számára</a:t>
             </a:r>
             <a:r>
-              <a:rPr lang="en-US" dirty="0"/>
+              <a:rPr lang="en-US" sz="3600" dirty="0"/>
               <a:t>. </a:t>
             </a:r>
             <a:r>
-              <a:rPr lang="en-US" dirty="0" err="1"/>
+              <a:rPr lang="en-US" sz="3600" dirty="0" err="1"/>
               <a:t>Hogyha</a:t>
             </a:r>
             <a:r>
-              <a:rPr lang="en-US" dirty="0"/>
+              <a:rPr lang="en-US" sz="3600" dirty="0"/>
               <a:t> a </a:t>
             </a:r>
             <a:r>
-              <a:rPr lang="en-US" dirty="0" err="1"/>
+              <a:rPr lang="en-US" sz="3600" dirty="0" err="1"/>
               <a:t>pozitív</a:t>
             </a:r>
             <a:r>
-              <a:rPr lang="en-US" dirty="0"/>
-              <a:t> </a:t>
-            </a:r>
-            <a:r>
-              <a:rPr lang="en-US" dirty="0" err="1"/>
+              <a:rPr lang="en-US" sz="3600" dirty="0"/>
+              <a:t> </a:t>
+            </a:r>
+            <a:r>
+              <a:rPr lang="en-US" sz="3600" dirty="0" err="1"/>
               <a:t>tömbből</a:t>
             </a:r>
             <a:r>
-              <a:rPr lang="en-US" dirty="0"/>
-              <a:t> </a:t>
-            </a:r>
-            <a:r>
-              <a:rPr lang="en-US" dirty="0" err="1"/>
+              <a:rPr lang="en-US" sz="3600" dirty="0"/>
+              <a:t> </a:t>
+            </a:r>
+            <a:r>
+              <a:rPr lang="en-US" sz="3600" dirty="0" err="1"/>
               <a:t>generál</a:t>
             </a:r>
             <a:r>
-              <a:rPr lang="en-US" dirty="0"/>
-              <a:t> </a:t>
-            </a:r>
-            <a:r>
-              <a:rPr lang="en-US" dirty="0" err="1"/>
+              <a:rPr lang="en-US" sz="3600" dirty="0"/>
+              <a:t> </a:t>
+            </a:r>
+            <a:r>
+              <a:rPr lang="en-US" sz="3600" dirty="0" err="1"/>
               <a:t>egyet</a:t>
             </a:r>
             <a:r>
-              <a:rPr lang="en-US" dirty="0"/>
-              <a:t> </a:t>
-            </a:r>
-            <a:r>
-              <a:rPr lang="en-US" dirty="0" err="1"/>
+              <a:rPr lang="en-US" sz="3600" dirty="0"/>
+              <a:t> </a:t>
+            </a:r>
+            <a:r>
+              <a:rPr lang="en-US" sz="3600" dirty="0" err="1"/>
               <a:t>akkor</a:t>
             </a:r>
             <a:r>
-              <a:rPr lang="en-US" dirty="0"/>
-              <a:t> </a:t>
-            </a:r>
-            <a:r>
-              <a:rPr lang="en-US" dirty="0" err="1"/>
+              <a:rPr lang="en-US" sz="3600" dirty="0"/>
+              <a:t> </a:t>
+            </a:r>
+            <a:r>
+              <a:rPr lang="en-US" sz="3600" dirty="0" err="1"/>
               <a:t>az</a:t>
             </a:r>
             <a:r>
-              <a:rPr lang="en-US" dirty="0"/>
-              <a:t> </a:t>
-            </a:r>
-            <a:r>
-              <a:rPr lang="en-US" dirty="0" err="1"/>
+              <a:rPr lang="en-US" sz="3600" dirty="0"/>
+              <a:t> </a:t>
+            </a:r>
+            <a:r>
+              <a:rPr lang="en-US" sz="3600" dirty="0" err="1"/>
               <a:t>árfolyamot</a:t>
             </a:r>
             <a:r>
-              <a:rPr lang="en-US" dirty="0"/>
-              <a:t> </a:t>
-            </a:r>
-            <a:r>
-              <a:rPr lang="en-US" dirty="0" err="1"/>
+              <a:rPr lang="en-US" sz="3600" dirty="0"/>
+              <a:t> </a:t>
+            </a:r>
+            <a:r>
+              <a:rPr lang="en-US" sz="3600" dirty="0" err="1"/>
               <a:t>megnöveli</a:t>
             </a:r>
             <a:r>
-              <a:rPr lang="en-US" dirty="0"/>
+              <a:rPr lang="en-US" sz="3600" dirty="0"/>
               <a:t> a </a:t>
             </a:r>
             <a:r>
-              <a:rPr lang="en-US" dirty="0" err="1"/>
+              <a:rPr lang="en-US" sz="3600" dirty="0" err="1"/>
               <a:t>jelenlegi</a:t>
             </a:r>
             <a:r>
-              <a:rPr lang="en-US" dirty="0"/>
-              <a:t> </a:t>
-            </a:r>
-            <a:r>
-              <a:rPr lang="en-US" dirty="0" err="1"/>
+              <a:rPr lang="en-US" sz="3600" dirty="0"/>
+              <a:t> </a:t>
+            </a:r>
+            <a:r>
+              <a:rPr lang="en-US" sz="3600" dirty="0" err="1"/>
               <a:t>ára</a:t>
             </a:r>
             <a:r>
-              <a:rPr lang="en-US" dirty="0"/>
+              <a:rPr lang="en-US" sz="3600" dirty="0"/>
               <a:t> 1.5%-val. </a:t>
             </a:r>
             <a:r>
-              <a:rPr lang="en-US" dirty="0" err="1"/>
+              <a:rPr lang="en-US" sz="3600" dirty="0" err="1"/>
               <a:t>Amennyiben</a:t>
             </a:r>
             <a:r>
-              <a:rPr lang="en-US" dirty="0"/>
+              <a:rPr lang="en-US" sz="3600" dirty="0"/>
               <a:t> a </a:t>
             </a:r>
             <a:r>
-              <a:rPr lang="en-US" dirty="0" err="1"/>
+              <a:rPr lang="en-US" sz="3600" dirty="0" err="1"/>
               <a:t>negatív</a:t>
             </a:r>
             <a:r>
-              <a:rPr lang="en-US" dirty="0"/>
-              <a:t> </a:t>
-            </a:r>
-            <a:r>
-              <a:rPr lang="en-US" dirty="0" err="1"/>
+              <a:rPr lang="en-US" sz="3600" dirty="0"/>
+              <a:t> </a:t>
+            </a:r>
+            <a:r>
+              <a:rPr lang="en-US" sz="3600" dirty="0" err="1"/>
               <a:t>tömbből</a:t>
             </a:r>
             <a:r>
-              <a:rPr lang="en-US" dirty="0"/>
-              <a:t> </a:t>
-            </a:r>
-            <a:r>
-              <a:rPr lang="en-US" dirty="0" err="1"/>
+              <a:rPr lang="en-US" sz="3600" dirty="0"/>
+              <a:t> </a:t>
+            </a:r>
+            <a:r>
+              <a:rPr lang="en-US" sz="3600" dirty="0" err="1"/>
               <a:t>generál</a:t>
             </a:r>
             <a:r>
-              <a:rPr lang="en-US" dirty="0"/>
-              <a:t> </a:t>
-            </a:r>
-            <a:r>
-              <a:rPr lang="en-US" dirty="0" err="1"/>
+              <a:rPr lang="en-US" sz="3600" dirty="0"/>
+              <a:t> </a:t>
+            </a:r>
+            <a:r>
+              <a:rPr lang="en-US" sz="3600" dirty="0" err="1"/>
               <a:t>számot</a:t>
             </a:r>
             <a:r>
-              <a:rPr lang="en-US" dirty="0"/>
-              <a:t> </a:t>
-            </a:r>
-            <a:r>
-              <a:rPr lang="en-US" dirty="0" err="1"/>
+              <a:rPr lang="en-US" sz="3600" dirty="0"/>
+              <a:t> </a:t>
+            </a:r>
+            <a:r>
+              <a:rPr lang="en-US" sz="3600" dirty="0" err="1"/>
               <a:t>akkor</a:t>
             </a:r>
             <a:r>
-              <a:rPr lang="en-US" dirty="0"/>
-              <a:t> </a:t>
-            </a:r>
-            <a:r>
-              <a:rPr lang="en-US" dirty="0" err="1"/>
+              <a:rPr lang="en-US" sz="3600" dirty="0"/>
+              <a:t> </a:t>
+            </a:r>
+            <a:r>
+              <a:rPr lang="en-US" sz="3600" dirty="0" err="1"/>
               <a:t>az</a:t>
             </a:r>
             <a:r>
-              <a:rPr lang="en-US" dirty="0"/>
-              <a:t> </a:t>
-            </a:r>
-            <a:r>
-              <a:rPr lang="en-US" dirty="0" err="1"/>
+              <a:rPr lang="en-US" sz="3600" dirty="0"/>
+              <a:t> </a:t>
+            </a:r>
+            <a:r>
+              <a:rPr lang="en-US" sz="3600" dirty="0" err="1"/>
               <a:t>árfolyamot</a:t>
             </a:r>
             <a:r>
-              <a:rPr lang="en-US" dirty="0"/>
-              <a:t> </a:t>
-            </a:r>
-            <a:r>
-              <a:rPr lang="en-US" dirty="0" err="1"/>
+              <a:rPr lang="en-US" sz="3600" dirty="0"/>
+              <a:t> </a:t>
+            </a:r>
+            <a:r>
+              <a:rPr lang="en-US" sz="3600" dirty="0" err="1"/>
               <a:t>csökkenti</a:t>
             </a:r>
             <a:r>
-              <a:rPr lang="en-US" dirty="0"/>
+              <a:rPr lang="en-US" sz="3600" dirty="0"/>
               <a:t> a </a:t>
             </a:r>
             <a:r>
-              <a:rPr lang="en-US" dirty="0" err="1"/>
+              <a:rPr lang="en-US" sz="3600" dirty="0" err="1"/>
               <a:t>jelenlegi</a:t>
             </a:r>
             <a:r>
-              <a:rPr lang="en-US" dirty="0"/>
-              <a:t> </a:t>
-            </a:r>
-            <a:r>
-              <a:rPr lang="en-US" dirty="0" err="1"/>
+              <a:rPr lang="en-US" sz="3600" dirty="0"/>
+              <a:t> </a:t>
+            </a:r>
+            <a:r>
+              <a:rPr lang="en-US" sz="3600" dirty="0" err="1"/>
               <a:t>ára</a:t>
             </a:r>
             <a:r>
-              <a:rPr lang="en-US" dirty="0"/>
+              <a:rPr lang="en-US" sz="3600" dirty="0"/>
               <a:t> 1.5%-val.</a:t>
             </a:r>
           </a:p>
@@ -1986,282 +1992,285 @@
         </p:nvSpPr>
         <p:spPr>
           <a:xfrm>
-            <a:off x="504000" y="1326600"/>
+            <a:off x="504000" y="1521473"/>
             <a:ext cx="9071640" cy="3288240"/>
           </a:xfrm>
         </p:spPr>
         <p:txBody>
           <a:bodyPr>
-            <a:normAutofit fontScale="92500" lnSpcReduction="10000"/>
+            <a:noAutofit/>
           </a:bodyPr>
           <a:lstStyle/>
           <a:p>
-            <a:r>
-              <a:rPr lang="en-US" dirty="0" err="1"/>
+            <a:pPr algn="l"/>
+            <a:r>
+              <a:rPr lang="en-US" sz="3600" dirty="0" err="1"/>
               <a:t>Vételnél</a:t>
             </a:r>
             <a:r>
-              <a:rPr lang="en-US" dirty="0"/>
-              <a:t> </a:t>
-            </a:r>
-            <a:r>
-              <a:rPr lang="en-US" dirty="0" err="1"/>
+              <a:rPr lang="en-US" sz="3600" dirty="0"/>
+              <a:t> </a:t>
+            </a:r>
+            <a:r>
+              <a:rPr lang="en-US" sz="3600" dirty="0" err="1"/>
               <a:t>és</a:t>
             </a:r>
             <a:r>
-              <a:rPr lang="en-US" dirty="0"/>
-              <a:t> </a:t>
-            </a:r>
-            <a:r>
-              <a:rPr lang="en-US" dirty="0" err="1"/>
+              <a:rPr lang="en-US" sz="3600" dirty="0"/>
+              <a:t> </a:t>
+            </a:r>
+            <a:r>
+              <a:rPr lang="en-US" sz="3600" dirty="0" err="1"/>
               <a:t>eladásnál</a:t>
             </a:r>
             <a:r>
-              <a:rPr lang="en-US" dirty="0"/>
+              <a:rPr lang="en-US" sz="3600" dirty="0"/>
               <a:t> is scanner-</a:t>
             </a:r>
             <a:r>
-              <a:rPr lang="en-US" dirty="0" err="1"/>
+              <a:rPr lang="en-US" sz="3600" dirty="0" err="1"/>
               <a:t>el</a:t>
             </a:r>
             <a:r>
-              <a:rPr lang="en-US" dirty="0"/>
-              <a:t> </a:t>
-            </a:r>
-            <a:r>
-              <a:rPr lang="en-US" dirty="0" err="1"/>
+              <a:rPr lang="en-US" sz="3600" dirty="0"/>
+              <a:t> </a:t>
+            </a:r>
+            <a:r>
+              <a:rPr lang="en-US" sz="3600" dirty="0" err="1"/>
               <a:t>adjuk</a:t>
             </a:r>
             <a:r>
-              <a:rPr lang="en-US" dirty="0"/>
+              <a:rPr lang="en-US" sz="3600" dirty="0"/>
               <a:t> meg </a:t>
             </a:r>
             <a:r>
-              <a:rPr lang="en-US" dirty="0" err="1"/>
+              <a:rPr lang="en-US" sz="3600" dirty="0" err="1"/>
               <a:t>hogy</a:t>
             </a:r>
             <a:r>
-              <a:rPr lang="en-US" dirty="0"/>
-              <a:t> </a:t>
-            </a:r>
-            <a:r>
-              <a:rPr lang="en-US" dirty="0" err="1"/>
+              <a:rPr lang="en-US" sz="3600" dirty="0"/>
+              <a:t> </a:t>
+            </a:r>
+            <a:r>
+              <a:rPr lang="en-US" sz="3600" dirty="0" err="1"/>
               <a:t>miből</a:t>
             </a:r>
             <a:r>
-              <a:rPr lang="en-US" dirty="0"/>
-              <a:t> </a:t>
-            </a:r>
-            <a:r>
-              <a:rPr lang="en-US" dirty="0" err="1"/>
+              <a:rPr lang="en-US" sz="3600" dirty="0"/>
+              <a:t> </a:t>
+            </a:r>
+            <a:r>
+              <a:rPr lang="en-US" sz="3600" dirty="0" err="1"/>
               <a:t>és</a:t>
             </a:r>
             <a:r>
-              <a:rPr lang="en-US" dirty="0"/>
-              <a:t> </a:t>
-            </a:r>
-            <a:r>
-              <a:rPr lang="en-US" dirty="0" err="1"/>
+              <a:rPr lang="en-US" sz="3600" dirty="0"/>
+              <a:t> </a:t>
+            </a:r>
+            <a:r>
+              <a:rPr lang="en-US" sz="3600" dirty="0" err="1"/>
               <a:t>mennyit</a:t>
             </a:r>
             <a:r>
-              <a:rPr lang="en-US" dirty="0"/>
-              <a:t> </a:t>
-            </a:r>
-            <a:r>
-              <a:rPr lang="en-US" dirty="0" err="1"/>
+              <a:rPr lang="en-US" sz="3600" dirty="0"/>
+              <a:t> </a:t>
+            </a:r>
+            <a:r>
+              <a:rPr lang="en-US" sz="3600" dirty="0" err="1"/>
               <a:t>akarunk</a:t>
             </a:r>
             <a:r>
-              <a:rPr lang="en-US" dirty="0"/>
-              <a:t> </a:t>
-            </a:r>
-            <a:r>
-              <a:rPr lang="en-US" dirty="0" err="1"/>
+              <a:rPr lang="en-US" sz="3600" dirty="0"/>
+              <a:t> </a:t>
+            </a:r>
+            <a:r>
+              <a:rPr lang="en-US" sz="3600" dirty="0" err="1"/>
               <a:t>venni</a:t>
             </a:r>
             <a:r>
-              <a:rPr lang="en-US" dirty="0"/>
+              <a:rPr lang="en-US" sz="3600" dirty="0"/>
               <a:t> / </a:t>
             </a:r>
             <a:r>
-              <a:rPr lang="en-US" dirty="0" err="1"/>
+              <a:rPr lang="en-US" sz="3600" dirty="0" err="1"/>
               <a:t>eladni</a:t>
             </a:r>
             <a:r>
-              <a:rPr lang="en-US" dirty="0"/>
+              <a:rPr lang="en-US" sz="3600" dirty="0"/>
               <a:t>.</a:t>
             </a:r>
           </a:p>
           <a:p>
-            <a:r>
-              <a:rPr lang="en-US" dirty="0" err="1"/>
+            <a:pPr algn="l"/>
+            <a:r>
+              <a:rPr lang="en-US" sz="3600" dirty="0" err="1"/>
               <a:t>Hogyha</a:t>
             </a:r>
             <a:r>
-              <a:rPr lang="en-US" dirty="0"/>
-              <a:t> </a:t>
-            </a:r>
-            <a:r>
-              <a:rPr lang="en-US" dirty="0" err="1"/>
+              <a:rPr lang="en-US" sz="3600" dirty="0"/>
+              <a:t> </a:t>
+            </a:r>
+            <a:r>
+              <a:rPr lang="en-US" sz="3600" dirty="0" err="1"/>
               <a:t>nincsen</a:t>
             </a:r>
             <a:r>
-              <a:rPr lang="en-US" dirty="0"/>
-              <a:t> </a:t>
-            </a:r>
-            <a:r>
-              <a:rPr lang="en-US" dirty="0" err="1"/>
+              <a:rPr lang="en-US" sz="3600" dirty="0"/>
+              <a:t> </a:t>
+            </a:r>
+            <a:r>
+              <a:rPr lang="en-US" sz="3600" dirty="0" err="1"/>
               <a:t>részvényünk</a:t>
             </a:r>
             <a:r>
-              <a:rPr lang="en-US" dirty="0"/>
-              <a:t> </a:t>
-            </a:r>
-            <a:r>
-              <a:rPr lang="en-US" dirty="0" err="1"/>
+              <a:rPr lang="en-US" sz="3600" dirty="0"/>
+              <a:t> </a:t>
+            </a:r>
+            <a:r>
+              <a:rPr lang="en-US" sz="3600" dirty="0" err="1"/>
               <a:t>amiből</a:t>
             </a:r>
             <a:r>
-              <a:rPr lang="en-US" dirty="0"/>
-              <a:t> </a:t>
-            </a:r>
-            <a:r>
-              <a:rPr lang="en-US" dirty="0" err="1"/>
+              <a:rPr lang="en-US" sz="3600" dirty="0"/>
+              <a:t> </a:t>
+            </a:r>
+            <a:r>
+              <a:rPr lang="en-US" sz="3600" dirty="0" err="1"/>
               <a:t>tudnánk</a:t>
             </a:r>
             <a:r>
-              <a:rPr lang="en-US" dirty="0"/>
-              <a:t> </a:t>
-            </a:r>
-            <a:r>
-              <a:rPr lang="en-US" dirty="0" err="1"/>
+              <a:rPr lang="en-US" sz="3600" dirty="0"/>
+              <a:t> </a:t>
+            </a:r>
+            <a:r>
+              <a:rPr lang="en-US" sz="3600" dirty="0" err="1"/>
               <a:t>eladni</a:t>
             </a:r>
             <a:r>
-              <a:rPr lang="en-US" dirty="0"/>
-              <a:t> </a:t>
-            </a:r>
-            <a:r>
-              <a:rPr lang="en-US" dirty="0" err="1"/>
+              <a:rPr lang="en-US" sz="3600" dirty="0"/>
+              <a:t> </a:t>
+            </a:r>
+            <a:r>
+              <a:rPr lang="en-US" sz="3600" dirty="0" err="1"/>
               <a:t>akkor</a:t>
             </a:r>
             <a:r>
-              <a:rPr lang="en-US" dirty="0"/>
-              <a:t> </a:t>
-            </a:r>
-            <a:r>
-              <a:rPr lang="en-US" dirty="0" err="1"/>
+              <a:rPr lang="en-US" sz="3600" dirty="0"/>
+              <a:t> </a:t>
+            </a:r>
+            <a:r>
+              <a:rPr lang="en-US" sz="3600" dirty="0" err="1"/>
               <a:t>hibát</a:t>
             </a:r>
             <a:r>
-              <a:rPr lang="en-US" dirty="0"/>
+              <a:rPr lang="en-US" sz="3600" dirty="0"/>
               <a:t> ad ki a </a:t>
             </a:r>
             <a:r>
-              <a:rPr lang="en-US" dirty="0" err="1"/>
+              <a:rPr lang="en-US" sz="3600" dirty="0" err="1"/>
               <a:t>rendszer</a:t>
             </a:r>
             <a:r>
-              <a:rPr lang="en-US" dirty="0"/>
+              <a:rPr lang="en-US" sz="3600" dirty="0"/>
               <a:t>.</a:t>
             </a:r>
           </a:p>
           <a:p>
-            <a:r>
-              <a:rPr lang="en-US" dirty="0" err="1"/>
+            <a:pPr algn="l"/>
+            <a:r>
+              <a:rPr lang="en-US" sz="3600" dirty="0" err="1"/>
               <a:t>Hogyha</a:t>
             </a:r>
             <a:r>
-              <a:rPr lang="en-US" dirty="0"/>
+              <a:rPr lang="en-US" sz="3600" dirty="0"/>
               <a:t> van </a:t>
             </a:r>
             <a:r>
-              <a:rPr lang="en-US" dirty="0" err="1"/>
+              <a:rPr lang="en-US" sz="3600" dirty="0" err="1"/>
               <a:t>részvényünk</a:t>
             </a:r>
             <a:r>
-              <a:rPr lang="en-US" dirty="0"/>
-              <a:t> </a:t>
-            </a:r>
-            <a:r>
-              <a:rPr lang="en-US" dirty="0" err="1"/>
+              <a:rPr lang="en-US" sz="3600" dirty="0"/>
+              <a:t> </a:t>
+            </a:r>
+            <a:r>
+              <a:rPr lang="en-US" sz="3600" dirty="0" err="1"/>
               <a:t>és</a:t>
             </a:r>
             <a:r>
-              <a:rPr lang="en-US" dirty="0"/>
-              <a:t> </a:t>
-            </a:r>
-            <a:r>
-              <a:rPr lang="en-US" dirty="0" err="1"/>
+              <a:rPr lang="en-US" sz="3600" dirty="0"/>
+              <a:t> </a:t>
+            </a:r>
+            <a:r>
+              <a:rPr lang="en-US" sz="3600" dirty="0" err="1"/>
               <a:t>eladjuk</a:t>
             </a:r>
             <a:r>
-              <a:rPr lang="en-US" dirty="0"/>
-              <a:t> </a:t>
-            </a:r>
-            <a:r>
-              <a:rPr lang="en-US" dirty="0" err="1"/>
+              <a:rPr lang="en-US" sz="3600" dirty="0"/>
+              <a:t> </a:t>
+            </a:r>
+            <a:r>
+              <a:rPr lang="en-US" sz="3600" dirty="0" err="1"/>
               <a:t>akkor</a:t>
             </a:r>
             <a:r>
-              <a:rPr lang="en-US" dirty="0"/>
+              <a:rPr lang="en-US" sz="3600" dirty="0"/>
               <a:t> a </a:t>
             </a:r>
             <a:r>
-              <a:rPr lang="en-US" dirty="0" err="1"/>
+              <a:rPr lang="en-US" sz="3600" dirty="0" err="1"/>
               <a:t>kiválasztott</a:t>
             </a:r>
             <a:r>
-              <a:rPr lang="en-US" dirty="0"/>
-              <a:t> </a:t>
-            </a:r>
-            <a:r>
-              <a:rPr lang="en-US" dirty="0" err="1"/>
+              <a:rPr lang="en-US" sz="3600" dirty="0"/>
+              <a:t> </a:t>
+            </a:r>
+            <a:r>
+              <a:rPr lang="en-US" sz="3600" dirty="0" err="1"/>
               <a:t>mennyiséget</a:t>
             </a:r>
             <a:r>
-              <a:rPr lang="en-US" dirty="0"/>
-              <a:t> </a:t>
-            </a:r>
-            <a:r>
-              <a:rPr lang="en-US" dirty="0" err="1"/>
+              <a:rPr lang="en-US" sz="3600" dirty="0"/>
+              <a:t> </a:t>
+            </a:r>
+            <a:r>
+              <a:rPr lang="en-US" sz="3600" dirty="0" err="1"/>
               <a:t>megszorozza</a:t>
             </a:r>
             <a:r>
-              <a:rPr lang="en-US" dirty="0"/>
+              <a:rPr lang="en-US" sz="3600" dirty="0"/>
               <a:t> a </a:t>
             </a:r>
             <a:r>
-              <a:rPr lang="en-US" dirty="0" err="1"/>
+              <a:rPr lang="en-US" sz="3600" dirty="0" err="1"/>
               <a:t>részvényárfolyammal</a:t>
             </a:r>
             <a:r>
-              <a:rPr lang="en-US" dirty="0"/>
-              <a:t> </a:t>
-            </a:r>
-            <a:r>
-              <a:rPr lang="en-US" dirty="0" err="1"/>
+              <a:rPr lang="en-US" sz="3600" dirty="0"/>
+              <a:t> </a:t>
+            </a:r>
+            <a:r>
+              <a:rPr lang="en-US" sz="3600" dirty="0" err="1"/>
               <a:t>és</a:t>
             </a:r>
             <a:r>
-              <a:rPr lang="en-US" dirty="0"/>
-              <a:t> </a:t>
-            </a:r>
-            <a:r>
-              <a:rPr lang="en-US" dirty="0" err="1"/>
+              <a:rPr lang="en-US" sz="3600" dirty="0"/>
+              <a:t> </a:t>
+            </a:r>
+            <a:r>
+              <a:rPr lang="en-US" sz="3600" dirty="0" err="1"/>
               <a:t>hozzáadja</a:t>
             </a:r>
             <a:r>
-              <a:rPr lang="en-US" dirty="0"/>
+              <a:rPr lang="en-US" sz="3600" dirty="0"/>
               <a:t> a </a:t>
             </a:r>
             <a:r>
-              <a:rPr lang="en-US" dirty="0" err="1"/>
+              <a:rPr lang="en-US" sz="3600" dirty="0" err="1"/>
               <a:t>egyenlegünkhöz</a:t>
             </a:r>
             <a:r>
-              <a:rPr lang="en-US" dirty="0"/>
+              <a:rPr lang="en-US" sz="3600" dirty="0"/>
               <a:t>.</a:t>
             </a:r>
           </a:p>
@@ -2352,14 +2361,15 @@
         </p:nvSpPr>
         <p:spPr>
           <a:xfrm>
-            <a:off x="504000" y="1326600"/>
-            <a:ext cx="9071640" cy="3288240"/>
+            <a:off x="504000" y="1142527"/>
+            <a:ext cx="9071640" cy="3656386"/>
           </a:xfrm>
         </p:spPr>
         <p:txBody>
           <a:bodyPr/>
           <a:lstStyle/>
           <a:p>
+            <a:pPr algn="l"/>
             <a:r>
               <a:rPr lang="en-US" dirty="0" err="1"/>
               <a:t>Vételnél</a:t>
@@ -2541,13 +2551,13 @@
   <p:clrMapOvr>
     <a:masterClrMapping/>
   </p:clrMapOvr>
-  <mc:AlternateContent xmlns:mc="http://schemas.openxmlformats.org/markup-compatibility/2006">
-    <mc:Choice xmlns:p159="http://schemas.microsoft.com/office/powerpoint/2015/09/main" Requires="p159">
+  <mc:AlternateContent xmlns:mc="http://schemas.openxmlformats.org/markup-compatibility/2006" xmlns:p159="http://schemas.microsoft.com/office/powerpoint/2015/09/main">
+    <mc:Choice Requires="p159">
       <p:transition xmlns:p14="http://schemas.microsoft.com/office/powerpoint/2010/main" spd="slow" p14:dur="2000">
         <p159:morph option="byObject"/>
       </p:transition>
     </mc:Choice>
-    <mc:Fallback>
+    <mc:Fallback xmlns="">
       <p:transition spd="slow">
         <p:fade/>
       </p:transition>
@@ -2647,332 +2657,335 @@
         </p:spPr>
         <p:txBody>
           <a:bodyPr>
-            <a:normAutofit fontScale="85000" lnSpcReduction="20000"/>
+            <a:noAutofit/>
           </a:bodyPr>
           <a:lstStyle/>
           <a:p>
-            <a:r>
-              <a:rPr lang="en-US" dirty="0" err="1"/>
+            <a:pPr algn="l"/>
+            <a:r>
+              <a:rPr lang="en-US" sz="2800" dirty="0" err="1"/>
               <a:t>ujJatek</a:t>
             </a:r>
             <a:r>
-              <a:rPr lang="en-US" dirty="0"/>
+              <a:rPr lang="en-US" sz="2800" dirty="0"/>
               <a:t> – A program </a:t>
             </a:r>
             <a:r>
-              <a:rPr lang="en-US" dirty="0" err="1"/>
+              <a:rPr lang="en-US" sz="2800" dirty="0" err="1"/>
               <a:t>megnézi</a:t>
             </a:r>
             <a:r>
-              <a:rPr lang="en-US" dirty="0"/>
-              <a:t> </a:t>
-            </a:r>
-            <a:r>
-              <a:rPr lang="en-US" dirty="0" err="1"/>
+              <a:rPr lang="en-US" sz="2800" dirty="0"/>
+              <a:t> </a:t>
+            </a:r>
+            <a:r>
+              <a:rPr lang="en-US" sz="2800" dirty="0" err="1"/>
               <a:t>hogy</a:t>
             </a:r>
             <a:r>
-              <a:rPr lang="en-US" dirty="0"/>
+              <a:rPr lang="en-US" sz="2800" dirty="0"/>
               <a:t> van-e </a:t>
             </a:r>
             <a:r>
-              <a:rPr lang="en-US" dirty="0" err="1"/>
+              <a:rPr lang="en-US" sz="2800" dirty="0" err="1"/>
               <a:t>mentésünk</a:t>
             </a:r>
             <a:r>
-              <a:rPr lang="en-US" dirty="0"/>
+              <a:rPr lang="en-US" sz="2800" dirty="0"/>
               <a:t>, ha van </a:t>
             </a:r>
             <a:r>
-              <a:rPr lang="en-US" dirty="0" err="1"/>
+              <a:rPr lang="en-US" sz="2800" dirty="0" err="1"/>
               <a:t>akkor</a:t>
             </a:r>
             <a:r>
-              <a:rPr lang="en-US" dirty="0"/>
-              <a:t> </a:t>
-            </a:r>
-            <a:r>
-              <a:rPr lang="en-US" dirty="0" err="1"/>
+              <a:rPr lang="en-US" sz="2800" dirty="0"/>
+              <a:t> </a:t>
+            </a:r>
+            <a:r>
+              <a:rPr lang="en-US" sz="2800" dirty="0" err="1"/>
               <a:t>törli</a:t>
             </a:r>
             <a:r>
-              <a:rPr lang="en-US" dirty="0"/>
-              <a:t> </a:t>
-            </a:r>
-            <a:r>
-              <a:rPr lang="en-US" dirty="0" err="1"/>
+              <a:rPr lang="en-US" sz="2800" dirty="0"/>
+              <a:t> </a:t>
+            </a:r>
+            <a:r>
+              <a:rPr lang="en-US" sz="2800" dirty="0" err="1"/>
               <a:t>és</a:t>
             </a:r>
             <a:r>
-              <a:rPr lang="en-US" dirty="0"/>
-              <a:t> </a:t>
-            </a:r>
-            <a:r>
-              <a:rPr lang="en-US" dirty="0" err="1"/>
+              <a:rPr lang="en-US" sz="2800" dirty="0"/>
+              <a:t> </a:t>
+            </a:r>
+            <a:r>
+              <a:rPr lang="en-US" sz="2800" dirty="0" err="1"/>
               <a:t>létrehoz</a:t>
             </a:r>
             <a:r>
-              <a:rPr lang="en-US" dirty="0"/>
-              <a:t> </a:t>
-            </a:r>
-            <a:r>
-              <a:rPr lang="en-US" dirty="0" err="1"/>
+              <a:rPr lang="en-US" sz="2800" dirty="0"/>
+              <a:t> </a:t>
+            </a:r>
+            <a:r>
+              <a:rPr lang="en-US" sz="2800" dirty="0" err="1"/>
               <a:t>egy</a:t>
             </a:r>
             <a:r>
-              <a:rPr lang="en-US" dirty="0"/>
-              <a:t> </a:t>
-            </a:r>
-            <a:r>
-              <a:rPr lang="en-US" dirty="0" err="1"/>
+              <a:rPr lang="en-US" sz="2800" dirty="0"/>
+              <a:t> </a:t>
+            </a:r>
+            <a:r>
+              <a:rPr lang="en-US" sz="2800" dirty="0" err="1"/>
               <a:t>újat</a:t>
             </a:r>
             <a:r>
-              <a:rPr lang="en-US" dirty="0"/>
+              <a:rPr lang="en-US" sz="2800" dirty="0"/>
               <a:t>. Minden </a:t>
             </a:r>
             <a:r>
-              <a:rPr lang="en-US" dirty="0" err="1"/>
+              <a:rPr lang="en-US" sz="2800" dirty="0" err="1"/>
               <a:t>adat</a:t>
             </a:r>
             <a:r>
-              <a:rPr lang="en-US" dirty="0"/>
+              <a:rPr lang="en-US" sz="2800" dirty="0"/>
               <a:t> (</a:t>
             </a:r>
             <a:r>
-              <a:rPr lang="en-US" dirty="0" err="1"/>
+              <a:rPr lang="en-US" sz="2800" dirty="0" err="1"/>
               <a:t>egyenleg</a:t>
             </a:r>
             <a:r>
-              <a:rPr lang="en-US" dirty="0"/>
+              <a:rPr lang="en-US" sz="2800" dirty="0"/>
               <a:t>, </a:t>
             </a:r>
             <a:r>
-              <a:rPr lang="en-US" dirty="0" err="1"/>
+              <a:rPr lang="en-US" sz="2800" dirty="0" err="1"/>
               <a:t>részvények</a:t>
             </a:r>
             <a:r>
-              <a:rPr lang="en-US" dirty="0"/>
+              <a:rPr lang="en-US" sz="2800" dirty="0"/>
               <a:t>, </a:t>
             </a:r>
             <a:r>
-              <a:rPr lang="en-US" dirty="0" err="1"/>
+              <a:rPr lang="en-US" sz="2800" dirty="0" err="1"/>
               <a:t>részvényárfolyamok</a:t>
             </a:r>
             <a:r>
-              <a:rPr lang="en-US" dirty="0"/>
+              <a:rPr lang="en-US" sz="2800" dirty="0"/>
               <a:t>) </a:t>
             </a:r>
             <a:r>
-              <a:rPr lang="en-US" dirty="0" err="1"/>
+              <a:rPr lang="en-US" sz="2800" dirty="0" err="1"/>
               <a:t>alaphelyzetbe</a:t>
             </a:r>
             <a:r>
-              <a:rPr lang="en-US" dirty="0"/>
-              <a:t> </a:t>
-            </a:r>
-            <a:r>
-              <a:rPr lang="en-US" dirty="0" err="1"/>
+              <a:rPr lang="en-US" sz="2800" dirty="0"/>
+              <a:t> </a:t>
+            </a:r>
+            <a:r>
+              <a:rPr lang="en-US" sz="2800" dirty="0" err="1"/>
               <a:t>állítódnak</a:t>
             </a:r>
             <a:r>
-              <a:rPr lang="en-US" dirty="0"/>
+              <a:rPr lang="en-US" sz="2800" dirty="0"/>
               <a:t>.</a:t>
             </a:r>
           </a:p>
           <a:p>
-            <a:r>
-              <a:rPr lang="en-US" dirty="0" err="1"/>
+            <a:pPr algn="l"/>
+            <a:r>
+              <a:rPr lang="en-US" sz="2800" dirty="0" err="1"/>
               <a:t>mentesAdatok</a:t>
             </a:r>
             <a:r>
-              <a:rPr lang="en-US" dirty="0"/>
+              <a:rPr lang="en-US" sz="2800" dirty="0"/>
               <a:t> – A </a:t>
             </a:r>
             <a:r>
-              <a:rPr lang="en-US" dirty="0" err="1"/>
+              <a:rPr lang="en-US" sz="2800" dirty="0" err="1"/>
               <a:t>létrehozott</a:t>
             </a:r>
             <a:r>
-              <a:rPr lang="en-US" dirty="0"/>
+              <a:rPr lang="en-US" sz="2800" dirty="0"/>
               <a:t> user_data.dat </a:t>
             </a:r>
             <a:r>
-              <a:rPr lang="en-US" dirty="0" err="1"/>
+              <a:rPr lang="en-US" sz="2800" dirty="0" err="1"/>
               <a:t>fájlba</a:t>
             </a:r>
             <a:r>
-              <a:rPr lang="en-US" dirty="0"/>
-              <a:t> </a:t>
-            </a:r>
-            <a:r>
-              <a:rPr lang="en-US" dirty="0" err="1"/>
+              <a:rPr lang="en-US" sz="2800" dirty="0"/>
+              <a:t> </a:t>
+            </a:r>
+            <a:r>
+              <a:rPr lang="en-US" sz="2800" dirty="0" err="1"/>
               <a:t>elmenti</a:t>
             </a:r>
             <a:r>
-              <a:rPr lang="en-US" dirty="0"/>
+              <a:rPr lang="en-US" sz="2800" dirty="0"/>
               <a:t> a </a:t>
             </a:r>
             <a:r>
-              <a:rPr lang="en-US" dirty="0" err="1"/>
+              <a:rPr lang="en-US" sz="2800" dirty="0" err="1"/>
               <a:t>felhasználó</a:t>
             </a:r>
             <a:r>
-              <a:rPr lang="en-US" dirty="0"/>
-              <a:t> </a:t>
-            </a:r>
-            <a:r>
-              <a:rPr lang="en-US" dirty="0" err="1"/>
+              <a:rPr lang="en-US" sz="2800" dirty="0"/>
+              <a:t> </a:t>
+            </a:r>
+            <a:r>
+              <a:rPr lang="en-US" sz="2800" dirty="0" err="1"/>
               <a:t>adatait</a:t>
             </a:r>
             <a:r>
-              <a:rPr lang="en-US" dirty="0"/>
+              <a:rPr lang="en-US" sz="2800" dirty="0"/>
               <a:t>.</a:t>
             </a:r>
           </a:p>
           <a:p>
-            <a:r>
-              <a:rPr lang="en-US" dirty="0" err="1"/>
+            <a:pPr algn="l"/>
+            <a:r>
+              <a:rPr lang="en-US" sz="2800" dirty="0" err="1"/>
               <a:t>betoltAdatok</a:t>
             </a:r>
             <a:r>
-              <a:rPr lang="en-US" dirty="0"/>
+              <a:rPr lang="en-US" sz="2800" dirty="0"/>
               <a:t> – A program </a:t>
             </a:r>
             <a:r>
-              <a:rPr lang="en-US" dirty="0" err="1"/>
+              <a:rPr lang="en-US" sz="2800" dirty="0" err="1"/>
               <a:t>indulásakor</a:t>
             </a:r>
             <a:r>
-              <a:rPr lang="en-US" dirty="0"/>
+              <a:rPr lang="en-US" sz="2800" dirty="0"/>
               <a:t> a </a:t>
             </a:r>
             <a:r>
-              <a:rPr lang="en-US" dirty="0" err="1"/>
+              <a:rPr lang="en-US" sz="2800" dirty="0" err="1"/>
               <a:t>rendszer</a:t>
             </a:r>
             <a:r>
-              <a:rPr lang="en-US" dirty="0"/>
-              <a:t> </a:t>
-            </a:r>
-            <a:r>
-              <a:rPr lang="en-US" dirty="0" err="1"/>
+              <a:rPr lang="en-US" sz="2800" dirty="0"/>
+              <a:t> </a:t>
+            </a:r>
+            <a:r>
+              <a:rPr lang="en-US" sz="2800" dirty="0" err="1"/>
               <a:t>megnézi</a:t>
             </a:r>
             <a:r>
-              <a:rPr lang="en-US" dirty="0"/>
-              <a:t> </a:t>
-            </a:r>
-            <a:r>
-              <a:rPr lang="en-US" dirty="0" err="1"/>
+              <a:rPr lang="en-US" sz="2800" dirty="0"/>
+              <a:t> </a:t>
+            </a:r>
+            <a:r>
+              <a:rPr lang="en-US" sz="2800" dirty="0" err="1"/>
               <a:t>hogy</a:t>
             </a:r>
             <a:r>
-              <a:rPr lang="en-US" dirty="0"/>
+              <a:rPr lang="en-US" sz="2800" dirty="0"/>
               <a:t> van-e </a:t>
             </a:r>
             <a:r>
-              <a:rPr lang="en-US" dirty="0" err="1"/>
+              <a:rPr lang="en-US" sz="2800" dirty="0" err="1"/>
               <a:t>mentésfáljunk</a:t>
             </a:r>
             <a:r>
-              <a:rPr lang="en-US" dirty="0"/>
+              <a:rPr lang="en-US" sz="2800" dirty="0"/>
               <a:t>, ha van </a:t>
             </a:r>
             <a:r>
-              <a:rPr lang="en-US" dirty="0" err="1"/>
+              <a:rPr lang="en-US" sz="2800" dirty="0" err="1"/>
               <a:t>akkor</a:t>
             </a:r>
             <a:r>
-              <a:rPr lang="en-US" dirty="0"/>
-              <a:t> </a:t>
-            </a:r>
-            <a:r>
-              <a:rPr lang="en-US" dirty="0" err="1"/>
+              <a:rPr lang="en-US" sz="2800" dirty="0"/>
+              <a:t> </a:t>
+            </a:r>
+            <a:r>
+              <a:rPr lang="en-US" sz="2800" dirty="0" err="1"/>
               <a:t>betölti</a:t>
             </a:r>
             <a:r>
-              <a:rPr lang="en-US" dirty="0"/>
-              <a:t> </a:t>
-            </a:r>
-            <a:r>
-              <a:rPr lang="en-US" dirty="0" err="1"/>
+              <a:rPr lang="en-US" sz="2800" dirty="0"/>
+              <a:t> </a:t>
+            </a:r>
+            <a:r>
+              <a:rPr lang="en-US" sz="2800" dirty="0" err="1"/>
               <a:t>az</a:t>
             </a:r>
             <a:r>
-              <a:rPr lang="en-US" dirty="0"/>
-              <a:t> </a:t>
-            </a:r>
-            <a:r>
-              <a:rPr lang="en-US" dirty="0" err="1"/>
+              <a:rPr lang="en-US" sz="2800" dirty="0"/>
+              <a:t> </a:t>
+            </a:r>
+            <a:r>
+              <a:rPr lang="en-US" sz="2800" dirty="0" err="1"/>
               <a:t>adatokat</a:t>
             </a:r>
             <a:r>
-              <a:rPr lang="en-US" dirty="0"/>
+              <a:rPr lang="en-US" sz="2800" dirty="0"/>
               <a:t>. Ha a </a:t>
             </a:r>
             <a:r>
-              <a:rPr lang="en-US" dirty="0" err="1"/>
+              <a:rPr lang="en-US" sz="2800" dirty="0" err="1"/>
               <a:t>fálj</a:t>
             </a:r>
             <a:r>
-              <a:rPr lang="en-US" dirty="0"/>
-              <a:t> </a:t>
-            </a:r>
-            <a:r>
-              <a:rPr lang="en-US" dirty="0" err="1"/>
+              <a:rPr lang="en-US" sz="2800" dirty="0"/>
+              <a:t> </a:t>
+            </a:r>
+            <a:r>
+              <a:rPr lang="en-US" sz="2800" dirty="0" err="1"/>
               <a:t>nem</a:t>
             </a:r>
             <a:r>
-              <a:rPr lang="en-US" dirty="0"/>
-              <a:t> </a:t>
-            </a:r>
-            <a:r>
-              <a:rPr lang="en-US" dirty="0" err="1"/>
+              <a:rPr lang="en-US" sz="2800" dirty="0"/>
+              <a:t> </a:t>
+            </a:r>
+            <a:r>
+              <a:rPr lang="en-US" sz="2800" dirty="0" err="1"/>
               <a:t>létezik</a:t>
             </a:r>
             <a:r>
-              <a:rPr lang="en-US" dirty="0"/>
-              <a:t> </a:t>
-            </a:r>
-            <a:r>
-              <a:rPr lang="en-US" dirty="0" err="1"/>
+              <a:rPr lang="en-US" sz="2800" dirty="0"/>
+              <a:t> </a:t>
+            </a:r>
+            <a:r>
+              <a:rPr lang="en-US" sz="2800" dirty="0" err="1"/>
               <a:t>vagy</a:t>
             </a:r>
             <a:r>
-              <a:rPr lang="en-US" dirty="0"/>
-              <a:t> </a:t>
-            </a:r>
-            <a:r>
-              <a:rPr lang="en-US" dirty="0" err="1"/>
+              <a:rPr lang="en-US" sz="2800" dirty="0"/>
+              <a:t> </a:t>
+            </a:r>
+            <a:r>
+              <a:rPr lang="en-US" sz="2800" dirty="0" err="1"/>
               <a:t>nem</a:t>
             </a:r>
             <a:r>
-              <a:rPr lang="en-US" dirty="0"/>
-              <a:t> </a:t>
-            </a:r>
-            <a:r>
-              <a:rPr lang="en-US" dirty="0" err="1"/>
+              <a:rPr lang="en-US" sz="2800" dirty="0"/>
+              <a:t> </a:t>
+            </a:r>
+            <a:r>
+              <a:rPr lang="en-US" sz="2800" dirty="0" err="1"/>
               <a:t>elérhető</a:t>
             </a:r>
             <a:r>
-              <a:rPr lang="en-US" dirty="0"/>
-              <a:t> </a:t>
-            </a:r>
-            <a:r>
-              <a:rPr lang="en-US" dirty="0" err="1"/>
+              <a:rPr lang="en-US" sz="2800" dirty="0"/>
+              <a:t> </a:t>
+            </a:r>
+            <a:r>
+              <a:rPr lang="en-US" sz="2800" dirty="0" err="1"/>
               <a:t>akkor</a:t>
             </a:r>
             <a:r>
-              <a:rPr lang="en-US" dirty="0"/>
-              <a:t> </a:t>
-            </a:r>
-            <a:r>
-              <a:rPr lang="en-US" dirty="0" err="1"/>
+              <a:rPr lang="en-US" sz="2800" dirty="0"/>
+              <a:t> </a:t>
+            </a:r>
+            <a:r>
+              <a:rPr lang="en-US" sz="2800" dirty="0" err="1"/>
               <a:t>hibát</a:t>
             </a:r>
             <a:r>
-              <a:rPr lang="en-US" dirty="0"/>
+              <a:rPr lang="en-US" sz="2800" dirty="0"/>
               <a:t> ad ki.</a:t>
             </a:r>
           </a:p>
@@ -3066,13 +3079,13 @@
   <p:clrMapOvr>
     <a:masterClrMapping/>
   </p:clrMapOvr>
-  <mc:AlternateContent xmlns:mc="http://schemas.openxmlformats.org/markup-compatibility/2006">
-    <mc:Choice xmlns:p15="http://schemas.microsoft.com/office/powerpoint/2012/main" Requires="p15">
+  <mc:AlternateContent xmlns:mc="http://schemas.openxmlformats.org/markup-compatibility/2006" xmlns:p15="http://schemas.microsoft.com/office/powerpoint/2012/main">
+    <mc:Choice Requires="p15">
       <p:transition xmlns:p14="http://schemas.microsoft.com/office/powerpoint/2010/main" spd="slow" p14:dur="6000">
         <p15:prstTrans prst="curtains"/>
       </p:transition>
     </mc:Choice>
-    <mc:Fallback>
+    <mc:Fallback xmlns="">
       <p:transition spd="slow">
         <p:fade/>
       </p:transition>
@@ -3241,13 +3254,13 @@
   <p:clrMapOvr>
     <a:masterClrMapping/>
   </p:clrMapOvr>
-  <mc:AlternateContent xmlns:mc="http://schemas.openxmlformats.org/markup-compatibility/2006">
-    <mc:Choice xmlns:p159="http://schemas.microsoft.com/office/powerpoint/2015/09/main" Requires="p159">
+  <mc:AlternateContent xmlns:mc="http://schemas.openxmlformats.org/markup-compatibility/2006" xmlns:p159="http://schemas.microsoft.com/office/powerpoint/2015/09/main">
+    <mc:Choice Requires="p159">
       <p:transition xmlns:p14="http://schemas.microsoft.com/office/powerpoint/2010/main" spd="slow" p14:dur="2000">
         <p159:morph option="byObject"/>
       </p:transition>
     </mc:Choice>
-    <mc:Fallback>
+    <mc:Fallback xmlns="">
       <p:transition spd="slow">
         <p:fade/>
       </p:transition>
@@ -3329,139 +3342,143 @@
         </p:nvSpPr>
         <p:spPr>
           <a:xfrm>
-            <a:off x="504000" y="1326600"/>
-            <a:ext cx="8876220" cy="3288240"/>
+            <a:off x="504000" y="1474926"/>
+            <a:ext cx="8876220" cy="2991588"/>
           </a:xfrm>
         </p:spPr>
         <p:txBody>
           <a:bodyPr/>
           <a:lstStyle/>
           <a:p>
-            <a:r>
-              <a:rPr lang="en-US" dirty="0"/>
+            <a:pPr algn="l"/>
+            <a:r>
+              <a:rPr lang="en-US" sz="3600" dirty="0"/>
               <a:t>A </a:t>
             </a:r>
             <a:r>
-              <a:rPr lang="en-US" dirty="0" err="1"/>
+              <a:rPr lang="en-US" sz="3600" dirty="0" err="1"/>
               <a:t>felhasználó</a:t>
             </a:r>
             <a:r>
-              <a:rPr lang="en-US" dirty="0"/>
+              <a:rPr lang="en-US" sz="3600" dirty="0"/>
               <a:t> 10000 </a:t>
             </a:r>
             <a:r>
-              <a:rPr lang="en-US" dirty="0" err="1"/>
+              <a:rPr lang="en-US" sz="3600" dirty="0" err="1"/>
               <a:t>Euróval</a:t>
             </a:r>
             <a:r>
-              <a:rPr lang="en-US" dirty="0"/>
-              <a:t> </a:t>
-            </a:r>
-            <a:r>
-              <a:rPr lang="en-US" dirty="0" err="1"/>
+              <a:rPr lang="en-US" sz="3600" dirty="0"/>
+              <a:t> </a:t>
+            </a:r>
+            <a:r>
+              <a:rPr lang="en-US" sz="3600" dirty="0" err="1"/>
               <a:t>kezd</a:t>
             </a:r>
-            <a:endParaRPr lang="en-US" dirty="0"/>
-          </a:p>
-          <a:p>
-            <a:r>
-              <a:rPr lang="en-US" dirty="0"/>
+            <a:endParaRPr lang="en-US" sz="3600" dirty="0"/>
+          </a:p>
+          <a:p>
+            <a:pPr algn="l"/>
+            <a:r>
+              <a:rPr lang="en-US" sz="3600" dirty="0"/>
               <a:t>5 </a:t>
             </a:r>
             <a:r>
-              <a:rPr lang="en-US" dirty="0" err="1"/>
+              <a:rPr lang="en-US" sz="3600" dirty="0" err="1"/>
               <a:t>cégbe</a:t>
             </a:r>
             <a:r>
-              <a:rPr lang="en-US" dirty="0"/>
+              <a:rPr lang="en-US" sz="3600" dirty="0"/>
               <a:t> (Nvidia, AMD, Intel, Microsoft, Apple) </a:t>
             </a:r>
             <a:r>
-              <a:rPr lang="en-US" dirty="0" err="1"/>
+              <a:rPr lang="en-US" sz="3600" dirty="0" err="1"/>
               <a:t>tud</a:t>
             </a:r>
             <a:r>
-              <a:rPr lang="en-US" dirty="0"/>
-              <a:t> </a:t>
-            </a:r>
-            <a:r>
-              <a:rPr lang="en-US" dirty="0" err="1"/>
+              <a:rPr lang="en-US" sz="3600" dirty="0"/>
+              <a:t> </a:t>
+            </a:r>
+            <a:r>
+              <a:rPr lang="en-US" sz="3600" dirty="0" err="1"/>
               <a:t>befektetni</a:t>
             </a:r>
             <a:r>
-              <a:rPr lang="en-US" dirty="0"/>
+              <a:rPr lang="en-US" sz="3600" dirty="0"/>
               <a:t> x </a:t>
             </a:r>
             <a:r>
-              <a:rPr lang="en-US" dirty="0" err="1"/>
+              <a:rPr lang="en-US" sz="3600" dirty="0" err="1"/>
               <a:t>összeget</a:t>
             </a:r>
             <a:r>
-              <a:rPr lang="en-US" dirty="0"/>
+              <a:rPr lang="en-US" sz="3600" dirty="0"/>
               <a:t>.</a:t>
             </a:r>
           </a:p>
           <a:p>
-            <a:r>
-              <a:rPr lang="en-US" dirty="0"/>
+            <a:pPr algn="l"/>
+            <a:r>
+              <a:rPr lang="en-US" sz="3600" dirty="0"/>
               <a:t>Az </a:t>
             </a:r>
             <a:r>
-              <a:rPr lang="en-US" dirty="0" err="1"/>
+              <a:rPr lang="en-US" sz="3600" dirty="0" err="1"/>
               <a:t>árfolyam</a:t>
             </a:r>
             <a:r>
-              <a:rPr lang="en-US" dirty="0"/>
-              <a:t> </a:t>
-            </a:r>
-            <a:r>
-              <a:rPr lang="en-US" dirty="0" err="1"/>
+              <a:rPr lang="en-US" sz="3600" dirty="0"/>
+              <a:t> </a:t>
+            </a:r>
+            <a:r>
+              <a:rPr lang="en-US" sz="3600" dirty="0" err="1"/>
               <a:t>másodpercenként</a:t>
             </a:r>
             <a:r>
-              <a:rPr lang="en-US" dirty="0"/>
-              <a:t> </a:t>
-            </a:r>
-            <a:r>
-              <a:rPr lang="en-US" dirty="0" err="1"/>
+              <a:rPr lang="en-US" sz="3600" dirty="0"/>
+              <a:t> </a:t>
+            </a:r>
+            <a:r>
+              <a:rPr lang="en-US" sz="3600" dirty="0" err="1"/>
               <a:t>változik</a:t>
             </a:r>
             <a:r>
-              <a:rPr lang="en-US" dirty="0"/>
+              <a:rPr lang="en-US" sz="3600" dirty="0"/>
               <a:t>.</a:t>
             </a:r>
           </a:p>
           <a:p>
-            <a:r>
-              <a:rPr lang="en-US" dirty="0" err="1"/>
+            <a:pPr algn="l"/>
+            <a:r>
+              <a:rPr lang="en-US" sz="3600" dirty="0" err="1"/>
               <a:t>Kilépéskor</a:t>
             </a:r>
             <a:r>
-              <a:rPr lang="en-US" dirty="0"/>
-              <a:t> </a:t>
-            </a:r>
-            <a:r>
-              <a:rPr lang="en-US" dirty="0" err="1"/>
+              <a:rPr lang="en-US" sz="3600" dirty="0"/>
+              <a:t> </a:t>
+            </a:r>
+            <a:r>
+              <a:rPr lang="en-US" sz="3600" dirty="0" err="1"/>
               <a:t>elmenti</a:t>
             </a:r>
             <a:r>
-              <a:rPr lang="en-US" dirty="0"/>
+              <a:rPr lang="en-US" sz="3600" dirty="0"/>
               <a:t> a </a:t>
             </a:r>
             <a:r>
-              <a:rPr lang="en-US" dirty="0" err="1"/>
+              <a:rPr lang="en-US" sz="3600" dirty="0" err="1"/>
               <a:t>felhasználó</a:t>
             </a:r>
             <a:r>
-              <a:rPr lang="en-US" dirty="0"/>
-              <a:t> </a:t>
-            </a:r>
-            <a:r>
-              <a:rPr lang="en-US" dirty="0" err="1"/>
+              <a:rPr lang="en-US" sz="3600" dirty="0"/>
+              <a:t> </a:t>
+            </a:r>
+            <a:r>
+              <a:rPr lang="en-US" sz="3600" dirty="0" err="1"/>
               <a:t>adatait</a:t>
             </a:r>
             <a:r>
-              <a:rPr lang="en-US" dirty="0"/>
+              <a:rPr lang="en-US" sz="3600" dirty="0"/>
               <a:t> a program.</a:t>
             </a:r>
           </a:p>
@@ -3626,14 +3643,15 @@
         </p:nvSpPr>
         <p:spPr>
           <a:xfrm>
-            <a:off x="504000" y="1326600"/>
-            <a:ext cx="9071640" cy="3288240"/>
+            <a:off x="504000" y="837829"/>
+            <a:ext cx="9071640" cy="4265783"/>
           </a:xfrm>
         </p:spPr>
         <p:txBody>
           <a:bodyPr/>
           <a:lstStyle/>
           <a:p>
+            <a:pPr algn="l"/>
             <a:r>
               <a:rPr lang="en-US" dirty="0"/>
               <a:t>static class </a:t>
@@ -3744,6 +3762,7 @@
             </a:r>
           </a:p>
           <a:p>
+            <a:pPr algn="l"/>
             <a:r>
               <a:rPr lang="en-US" dirty="0"/>
               <a:t>SAVE_FILE: user_data.dat-ban </a:t>
@@ -3907,14 +3926,15 @@
         </p:nvSpPr>
         <p:spPr>
           <a:xfrm>
-            <a:off x="504000" y="1326600"/>
-            <a:ext cx="9071640" cy="3832140"/>
+            <a:off x="504000" y="1109779"/>
+            <a:ext cx="9071640" cy="4265783"/>
           </a:xfrm>
         </p:spPr>
         <p:txBody>
           <a:bodyPr/>
           <a:lstStyle/>
           <a:p>
+            <a:pPr algn="l"/>
             <a:r>
               <a:rPr lang="en-US" dirty="0"/>
               <a:t>Thread: </a:t>
@@ -4017,6 +4037,7 @@
             </a:r>
           </a:p>
           <a:p>
+            <a:pPr algn="l"/>
             <a:r>
               <a:rPr lang="en-US" dirty="0" err="1"/>
               <a:t>Ameddig</a:t>
@@ -4224,14 +4245,15 @@
         </p:nvSpPr>
         <p:spPr>
           <a:xfrm>
-            <a:off x="504000" y="1326600"/>
-            <a:ext cx="9071640" cy="3288240"/>
+            <a:off x="504000" y="2056623"/>
+            <a:ext cx="9071640" cy="1828193"/>
           </a:xfrm>
         </p:spPr>
         <p:txBody>
           <a:bodyPr/>
           <a:lstStyle/>
           <a:p>
+            <a:pPr algn="l"/>
             <a:r>
               <a:rPr lang="en-US" dirty="0"/>
               <a:t>While: scanner-</a:t>
@@ -4289,13 +4311,13 @@
   <p:clrMapOvr>
     <a:masterClrMapping/>
   </p:clrMapOvr>
-  <mc:AlternateContent xmlns:mc="http://schemas.openxmlformats.org/markup-compatibility/2006">
-    <mc:Choice xmlns:p159="http://schemas.microsoft.com/office/powerpoint/2015/09/main" Requires="p159">
+  <mc:AlternateContent xmlns:mc="http://schemas.openxmlformats.org/markup-compatibility/2006" xmlns:p159="http://schemas.microsoft.com/office/powerpoint/2015/09/main">
+    <mc:Choice Requires="p159">
       <p:transition xmlns:p14="http://schemas.microsoft.com/office/powerpoint/2010/main" spd="slow" p14:dur="2000">
         <p159:morph option="byObject"/>
       </p:transition>
     </mc:Choice>
-    <mc:Fallback>
+    <mc:Fallback xmlns="">
       <p:transition spd="slow">
         <p:fade/>
       </p:transition>
@@ -4378,10 +4400,11 @@
         </p:spPr>
         <p:txBody>
           <a:bodyPr>
-            <a:normAutofit fontScale="92500"/>
+            <a:normAutofit fontScale="92500" lnSpcReduction="20000"/>
           </a:bodyPr>
           <a:lstStyle/>
           <a:p>
+            <a:pPr algn="l"/>
             <a:r>
               <a:rPr lang="en-US" dirty="0"/>
               <a:t>1) “</a:t>
@@ -4420,6 +4443,7 @@
             </a:r>
           </a:p>
           <a:p>
+            <a:pPr algn="l"/>
             <a:r>
               <a:rPr lang="en-US" dirty="0"/>
               <a:t>2) “</a:t>
@@ -4466,6 +4490,7 @@
             </a:r>
           </a:p>
           <a:p>
+            <a:pPr algn="l"/>
             <a:r>
               <a:rPr lang="en-US" dirty="0"/>
               <a:t>3) “tart” – </a:t>
@@ -4496,6 +4521,7 @@
             </a:r>
           </a:p>
           <a:p>
+            <a:pPr algn="l"/>
             <a:r>
               <a:rPr lang="en-US" dirty="0"/>
               <a:t>4) “reset” – </a:t>
@@ -4566,6 +4592,7 @@
             </a:r>
           </a:p>
           <a:p>
+            <a:pPr algn="l"/>
             <a:r>
               <a:rPr lang="en-US" dirty="0"/>
               <a:t>5) “</a:t>
@@ -4625,6 +4652,7 @@
             <a:endParaRPr lang="en-US" dirty="0"/>
           </a:p>
           <a:p>
+            <a:pPr algn="l"/>
             <a:r>
               <a:rPr lang="en-US" dirty="0"/>
               <a:t>Minden </a:t>
@@ -4733,14 +4761,15 @@
         </p:nvSpPr>
         <p:spPr>
           <a:xfrm>
-            <a:off x="504000" y="1326600"/>
-            <a:ext cx="9071640" cy="3288240"/>
+            <a:off x="504000" y="2056623"/>
+            <a:ext cx="9071640" cy="1828193"/>
           </a:xfrm>
         </p:spPr>
         <p:txBody>
           <a:bodyPr/>
           <a:lstStyle/>
           <a:p>
+            <a:pPr algn="l"/>
             <a:r>
               <a:rPr lang="en-US" dirty="0"/>
               <a:t>Nem </a:t>

--- a/eloadasDone.pptx
+++ b/eloadasDone.pptx
@@ -3342,8 +3342,8 @@
         </p:nvSpPr>
         <p:spPr>
           <a:xfrm>
-            <a:off x="504000" y="1474926"/>
-            <a:ext cx="8876220" cy="2991588"/>
+            <a:off x="504000" y="2222823"/>
+            <a:ext cx="8876220" cy="1495794"/>
           </a:xfrm>
         </p:spPr>
         <p:txBody>
@@ -3414,72 +3414,6 @@
             <a:r>
               <a:rPr lang="en-US" sz="3600" dirty="0"/>
               <a:t>.</a:t>
-            </a:r>
-          </a:p>
-          <a:p>
-            <a:pPr algn="l"/>
-            <a:r>
-              <a:rPr lang="en-US" sz="3600" dirty="0"/>
-              <a:t>Az </a:t>
-            </a:r>
-            <a:r>
-              <a:rPr lang="en-US" sz="3600" dirty="0" err="1"/>
-              <a:t>árfolyam</a:t>
-            </a:r>
-            <a:r>
-              <a:rPr lang="en-US" sz="3600" dirty="0"/>
-              <a:t> </a:t>
-            </a:r>
-            <a:r>
-              <a:rPr lang="en-US" sz="3600" dirty="0" err="1"/>
-              <a:t>másodpercenként</a:t>
-            </a:r>
-            <a:r>
-              <a:rPr lang="en-US" sz="3600" dirty="0"/>
-              <a:t> </a:t>
-            </a:r>
-            <a:r>
-              <a:rPr lang="en-US" sz="3600" dirty="0" err="1"/>
-              <a:t>változik</a:t>
-            </a:r>
-            <a:r>
-              <a:rPr lang="en-US" sz="3600" dirty="0"/>
-              <a:t>.</a:t>
-            </a:r>
-          </a:p>
-          <a:p>
-            <a:pPr algn="l"/>
-            <a:r>
-              <a:rPr lang="en-US" sz="3600" dirty="0" err="1"/>
-              <a:t>Kilépéskor</a:t>
-            </a:r>
-            <a:r>
-              <a:rPr lang="en-US" sz="3600" dirty="0"/>
-              <a:t> </a:t>
-            </a:r>
-            <a:r>
-              <a:rPr lang="en-US" sz="3600" dirty="0" err="1"/>
-              <a:t>elmenti</a:t>
-            </a:r>
-            <a:r>
-              <a:rPr lang="en-US" sz="3600" dirty="0"/>
-              <a:t> a </a:t>
-            </a:r>
-            <a:r>
-              <a:rPr lang="en-US" sz="3600" dirty="0" err="1"/>
-              <a:t>felhasználó</a:t>
-            </a:r>
-            <a:r>
-              <a:rPr lang="en-US" sz="3600" dirty="0"/>
-              <a:t> </a:t>
-            </a:r>
-            <a:r>
-              <a:rPr lang="en-US" sz="3600" dirty="0" err="1"/>
-              <a:t>adatait</a:t>
-            </a:r>
-            <a:r>
-              <a:rPr lang="en-US" sz="3600" dirty="0"/>
-              <a:t> a program.</a:t>
             </a:r>
           </a:p>
         </p:txBody>
